--- a/public/fun/pack/pptx/family/가족소개_30_반려동물과함께_빨간우체통.pptx
+++ b/public/fun/pack/pptx/family/가족소개_30_반려동물과함께_빨간우체통.pptx
@@ -3286,6 +3286,14 @@
 <file path=ppt/slides/slide1.xml><?xml version="1.0" encoding="utf-8"?>
 <p:sld xmlns:a="http://schemas.openxmlformats.org/drawingml/2006/main" xmlns:p="http://schemas.openxmlformats.org/presentationml/2006/main" xmlns:r="http://schemas.openxmlformats.org/officeDocument/2006/relationships">
   <p:cSld>
+    <p:bg>
+      <p:bgPr>
+        <a:solidFill>
+          <a:srgbClr val="FBEFEC"/>
+        </a:solidFill>
+        <a:effectLst/>
+      </p:bgPr>
+    </p:bg>
     <p:spTree>
       <p:nvGrpSpPr>
         <p:cNvPr id="1" name=""/>
@@ -3293,30 +3301,119 @@
         <p:nvPr/>
       </p:nvGrpSpPr>
       <p:grpSpPr/>
-      <p:pic>
-        <p:nvPicPr>
-          <p:cNvPr id="3" name="표지 그림" descr="family-30.jpg"/>
-          <p:cNvPicPr>
-            <a:picLocks noChangeAspect="1"/>
-          </p:cNvPicPr>
+      <p:sp>
+        <p:nvSpPr>
+          <p:cNvPr id="3" name="사진 자리"/>
+          <p:cNvSpPr/>
           <p:nvPr/>
-        </p:nvPicPr>
-        <p:blipFill>
-          <a:blip r:embed="rId2"/>
-          <a:stretch>
-            <a:fillRect/>
-          </a:stretch>
-        </p:blipFill>
-        <p:spPr>
-          <a:xfrm>
-            <a:off x="0" y="0"/>
-            <a:ext cx="12191695" cy="6858000"/>
+        </p:nvSpPr>
+        <p:spPr>
+          <a:xfrm>
+            <a:off x="7558851" y="685800"/>
+            <a:ext cx="3169840" cy="5486400"/>
+          </a:xfrm>
+          <a:prstGeom prst="round2SameRect">
+            <a:avLst>
+              <a:gd name="adj1" fmla="val 50000"/>
+              <a:gd name="adj2" fmla="val 0"/>
+            </a:avLst>
+          </a:prstGeom>
+          <a:solidFill>
+            <a:srgbClr val="EBBAAD"/>
+          </a:solidFill>
+          <a:ln>
+            <a:noFill/>
+          </a:ln>
+        </p:spPr>
+        <p:txBody>
+          <a:bodyPr rtlCol="0" anchor="ctr" wrap="square" lIns="54864" rIns="54864" tIns="27432" bIns="27432">
+            <a:noAutofit/>
+          </a:bodyPr>
+          <a:lstStyle/>
+          <a:p>
+            <a:pPr algn="ctr">
+              <a:lnSpc>
+                <a:spcPct val="100000"/>
+              </a:lnSpc>
+            </a:pPr>
+            <a:r>
+              <a:rPr sz="1400" b="0" i="0">
+                <a:solidFill>
+                  <a:srgbClr val="492E27"/>
+                </a:solidFill>
+              </a:rPr>
+              <a:t>사진을 넣어 주세요</a:t>
+            </a:r>
+          </a:p>
+        </p:txBody>
+      </p:sp>
+      <p:sp>
+        <p:nvSpPr>
+          <p:cNvPr id="4" name="장식"/>
+          <p:cNvSpPr/>
+          <p:nvPr/>
+        </p:nvSpPr>
+        <p:spPr>
+          <a:xfrm>
+            <a:off x="6827349" y="4251960"/>
+            <a:ext cx="1005840" cy="1005840"/>
+          </a:xfrm>
+          <a:prstGeom prst="ellipse">
+            <a:avLst/>
+          </a:prstGeom>
+          <a:solidFill>
+            <a:srgbClr val="EBBAAD"/>
+          </a:solidFill>
+          <a:ln>
+            <a:noFill/>
+          </a:ln>
+        </p:spPr>
+        <p:txBody>
+          <a:bodyPr rtlCol="0" anchor="ctr"/>
+          <a:lstStyle/>
+          <a:p>
+            <a:pPr algn="ctr"/>
+          </a:p>
+        </p:txBody>
+      </p:sp>
+      <p:sp>
+        <p:nvSpPr>
+          <p:cNvPr id="5" name="라벨"/>
+          <p:cNvSpPr txBox="1"/>
+          <p:nvPr/>
+        </p:nvSpPr>
+        <p:spPr>
+          <a:xfrm>
+            <a:off x="822960" y="2148840"/>
+            <a:ext cx="5608179" cy="274320"/>
           </a:xfrm>
           <a:prstGeom prst="rect">
             <a:avLst/>
           </a:prstGeom>
-        </p:spPr>
-      </p:pic>
+          <a:noFill/>
+        </p:spPr>
+        <p:txBody>
+          <a:bodyPr wrap="square" lIns="54864" rIns="54864" tIns="27432" bIns="27432" anchor="t">
+            <a:noAutofit/>
+          </a:bodyPr>
+          <a:lstStyle/>
+          <a:p>
+            <a:pPr algn="l">
+              <a:lnSpc>
+                <a:spcPct val="115000"/>
+              </a:lnSpc>
+            </a:pPr>
+            <a:r>
+              <a:rPr sz="1000" b="1" i="0" spc="250">
+                <a:solidFill>
+                  <a:srgbClr val="26231F"/>
+                </a:solidFill>
+              </a:rPr>
+              <a:t>FAMILY ALBUM</a:t>
+            </a:r>
+          </a:p>
+        </p:txBody>
+      </p:sp>
       <p:sp>
         <p:nvSpPr>
           <p:cNvPr id="2" name="Title 1"/>
@@ -3329,8 +3426,8 @@
         </p:nvSpPr>
         <p:spPr>
           <a:xfrm>
-            <a:off x="853418" y="2057400"/>
-            <a:ext cx="6095847" cy="1554480"/>
+            <a:off x="822960" y="2606040"/>
+            <a:ext cx="5608179" cy="1188720"/>
           </a:xfrm>
         </p:spPr>
         <p:txBody>
@@ -3345,9 +3442,9 @@
               </a:lnSpc>
             </a:pPr>
             <a:r>
-              <a:rPr sz="3600" b="1" i="0">
-                <a:solidFill>
-                  <a:srgbClr val="5B2315"/>
+              <a:rPr sz="4000" b="1" i="0">
+                <a:solidFill>
+                  <a:srgbClr val="26231F"/>
                 </a:solidFill>
               </a:rPr>
               <a:t>우리 가족을 소개합니다</a:t>
@@ -3357,14 +3454,14 @@
       </p:sp>
       <p:sp>
         <p:nvSpPr>
-          <p:cNvPr id="4" name="한 줄 문구"/>
+          <p:cNvPr id="6" name="한 줄 문구"/>
           <p:cNvSpPr txBox="1"/>
           <p:nvPr/>
         </p:nvSpPr>
         <p:spPr>
           <a:xfrm>
-            <a:off x="853418" y="3749039"/>
-            <a:ext cx="6095847" cy="822960"/>
+            <a:off x="822960" y="3886200"/>
+            <a:ext cx="5608179" cy="822960"/>
           </a:xfrm>
           <a:prstGeom prst="rect">
             <a:avLst/>
@@ -3383,9 +3480,9 @@
               </a:lnSpc>
             </a:pPr>
             <a:r>
-              <a:rPr sz="1700" b="0" i="1">
-                <a:solidFill>
-                  <a:srgbClr val="5B2315"/>
+              <a:rPr sz="1700" b="0" i="0">
+                <a:solidFill>
+                  <a:srgbClr val="26231F"/>
                 </a:solidFill>
               </a:rPr>
               <a:t>빨간 우체통 앞에서 기다리던 모습</a:t>
@@ -3395,14 +3492,14 @@
       </p:sp>
       <p:sp>
         <p:nvSpPr>
-          <p:cNvPr id="5" name="안내 문구"/>
+          <p:cNvPr id="7" name="안내 문구"/>
           <p:cNvSpPr txBox="1"/>
           <p:nvPr/>
         </p:nvSpPr>
         <p:spPr>
           <a:xfrm>
-            <a:off x="853418" y="4617720"/>
-            <a:ext cx="6095847" cy="914400"/>
+            <a:off x="822960" y="4754880"/>
+            <a:ext cx="5608179" cy="914400"/>
           </a:xfrm>
           <a:prstGeom prst="rect">
             <a:avLst/>
@@ -3423,10 +3520,10 @@
             <a:r>
               <a:rPr sz="1400" b="0" i="0">
                 <a:solidFill>
-                  <a:srgbClr val="666666"/>
+                  <a:srgbClr val="26231F"/>
                 </a:solidFill>
               </a:rPr>
-              <a:t>반려동물과 함께 · 2027. 00. 00</a:t>
+              <a:t>반려동물과 함께 · 날짜 입력</a:t>
             </a:r>
           </a:p>
         </p:txBody>
@@ -3445,7 +3542,7 @@
     <p:bg>
       <p:bgPr>
         <a:solidFill>
-          <a:srgbClr val="FBF1EE"/>
+          <a:srgbClr val="FBEFEC"/>
         </a:solidFill>
         <a:effectLst/>
       </p:bgPr>
@@ -3464,18 +3561,15 @@
           <p:nvPr/>
         </p:nvSpPr>
         <p:spPr>
-          <a:xfrm rot="10800000">
-            <a:off x="10637215" y="0"/>
-            <a:ext cx="914400" cy="1554480"/>
-          </a:xfrm>
-          <a:prstGeom prst="round2SameRect">
-            <a:avLst>
-              <a:gd name="adj1" fmla="val 50000"/>
-              <a:gd name="adj2" fmla="val 0"/>
-            </a:avLst>
+          <a:xfrm>
+            <a:off x="640080" y="566928"/>
+            <a:ext cx="10911535" cy="10972"/>
+          </a:xfrm>
+          <a:prstGeom prst="rect">
+            <a:avLst/>
           </a:prstGeom>
           <a:solidFill>
-            <a:srgbClr val="F5D4CC"/>
+            <a:srgbClr val="26231F"/>
           </a:solidFill>
           <a:ln>
             <a:noFill/>
@@ -3491,6 +3585,73 @@
       </p:sp>
       <p:sp>
         <p:nvSpPr>
+          <p:cNvPr id="4" name="상단 라벨"/>
+          <p:cNvSpPr txBox="1"/>
+          <p:nvPr/>
+        </p:nvSpPr>
+        <p:spPr>
+          <a:xfrm>
+            <a:off x="640080" y="237744"/>
+            <a:ext cx="5486400" cy="274320"/>
+          </a:xfrm>
+          <a:prstGeom prst="rect">
+            <a:avLst/>
+          </a:prstGeom>
+          <a:noFill/>
+        </p:spPr>
+        <p:txBody>
+          <a:bodyPr wrap="square" lIns="54864" rIns="54864" tIns="27432" bIns="27432" anchor="ctr">
+            <a:noAutofit/>
+          </a:bodyPr>
+          <a:lstStyle/>
+          <a:p>
+            <a:pPr algn="l">
+              <a:lnSpc>
+                <a:spcPct val="115000"/>
+              </a:lnSpc>
+            </a:pPr>
+            <a:r>
+              <a:rPr sz="900" b="1" i="0" spc="250">
+                <a:solidFill>
+                  <a:srgbClr val="26231F"/>
+                </a:solidFill>
+              </a:rPr>
+              <a:t>FAMILY ALBUM</a:t>
+            </a:r>
+          </a:p>
+        </p:txBody>
+      </p:sp>
+      <p:sp>
+        <p:nvSpPr>
+          <p:cNvPr id="5" name="포인트"/>
+          <p:cNvSpPr/>
+          <p:nvPr/>
+        </p:nvSpPr>
+        <p:spPr>
+          <a:xfrm>
+            <a:off x="11204143" y="246888"/>
+            <a:ext cx="237744" cy="237744"/>
+          </a:xfrm>
+          <a:prstGeom prst="moon">
+            <a:avLst/>
+          </a:prstGeom>
+          <a:solidFill>
+            <a:srgbClr val="D88C79"/>
+          </a:solidFill>
+          <a:ln>
+            <a:noFill/>
+          </a:ln>
+        </p:spPr>
+        <p:txBody>
+          <a:bodyPr rtlCol="0" anchor="ctr"/>
+          <a:lstStyle/>
+          <a:p>
+            <a:pPr algn="ctr"/>
+          </a:p>
+        </p:txBody>
+      </p:sp>
+      <p:sp>
+        <p:nvSpPr>
           <p:cNvPr id="2" name="Title 1"/>
           <p:cNvSpPr>
             <a:spLocks noGrp="1"/>
@@ -3501,8 +3662,8 @@
         </p:nvSpPr>
         <p:spPr>
           <a:xfrm>
-            <a:off x="640080" y="457200"/>
-            <a:ext cx="9722815" cy="868680"/>
+            <a:off x="640080" y="731520"/>
+            <a:ext cx="10911535" cy="822960"/>
           </a:xfrm>
         </p:spPr>
         <p:txBody>
@@ -3519,7 +3680,7 @@
             <a:r>
               <a:rPr sz="3000" b="1" i="0">
                 <a:solidFill>
-                  <a:srgbClr val="5B2315"/>
+                  <a:srgbClr val="26231F"/>
                 </a:solidFill>
               </a:rPr>
               <a:t>가족 구성원</a:t>
@@ -3529,25 +3690,23 @@
       </p:sp>
       <p:sp>
         <p:nvSpPr>
-          <p:cNvPr id="4" name="사진 자리"/>
+          <p:cNvPr id="6" name="사진 자리"/>
           <p:cNvSpPr/>
           <p:nvPr/>
         </p:nvSpPr>
         <p:spPr>
           <a:xfrm>
-            <a:off x="1182319" y="1600200"/>
-            <a:ext cx="2400300" cy="2400300"/>
+            <a:off x="1239469" y="1783080"/>
+            <a:ext cx="2286000" cy="2286000"/>
           </a:xfrm>
           <a:prstGeom prst="ellipse">
             <a:avLst/>
           </a:prstGeom>
           <a:solidFill>
-            <a:srgbClr val="F5D4CC"/>
+            <a:srgbClr val="F6DCD5"/>
           </a:solidFill>
           <a:ln w="19050">
-            <a:solidFill>
-              <a:srgbClr val="AE4329"/>
-            </a:solidFill>
+            <a:noFill/>
             <a:prstDash val="dash"/>
           </a:ln>
         </p:spPr>
@@ -3565,7 +3724,7 @@
             <a:r>
               <a:rPr sz="1200" b="0" i="0">
                 <a:solidFill>
-                  <a:srgbClr val="5B2315"/>
+                  <a:srgbClr val="8E8780"/>
                 </a:solidFill>
               </a:rPr>
               <a:t>사진</a:t>
@@ -3575,13 +3734,13 @@
       </p:sp>
       <p:sp>
         <p:nvSpPr>
-          <p:cNvPr id="5" name="TextBox 4"/>
+          <p:cNvPr id="7" name="TextBox 6"/>
           <p:cNvSpPr txBox="1"/>
           <p:nvPr/>
         </p:nvSpPr>
         <p:spPr>
           <a:xfrm>
-            <a:off x="640080" y="4091939"/>
+            <a:off x="640080" y="4160520"/>
             <a:ext cx="3484778" cy="411480"/>
           </a:xfrm>
           <a:prstGeom prst="rect">
@@ -3603,7 +3762,7 @@
             <a:r>
               <a:rPr sz="1600" b="1" i="0">
                 <a:solidFill>
-                  <a:srgbClr val="5B2315"/>
+                  <a:srgbClr val="492E27"/>
                 </a:solidFill>
               </a:rPr>
               <a:t>보호자 1</a:t>
@@ -3613,14 +3772,14 @@
       </p:sp>
       <p:sp>
         <p:nvSpPr>
-          <p:cNvPr id="6" name="TextBox 5"/>
+          <p:cNvPr id="8" name="TextBox 7"/>
           <p:cNvSpPr txBox="1"/>
           <p:nvPr/>
         </p:nvSpPr>
         <p:spPr>
           <a:xfrm>
-            <a:off x="731519" y="4549140"/>
-            <a:ext cx="3301898" cy="1851660"/>
+            <a:off x="731519" y="4617720"/>
+            <a:ext cx="3301898" cy="1737360"/>
           </a:xfrm>
           <a:prstGeom prst="rect">
             <a:avLst/>
@@ -3681,25 +3840,23 @@
       </p:sp>
       <p:sp>
         <p:nvSpPr>
-          <p:cNvPr id="7" name="사진 자리"/>
+          <p:cNvPr id="9" name="사진 자리"/>
           <p:cNvSpPr/>
           <p:nvPr/>
         </p:nvSpPr>
         <p:spPr>
           <a:xfrm>
-            <a:off x="4895697" y="1600200"/>
-            <a:ext cx="2400300" cy="2400300"/>
+            <a:off x="4952847" y="1783080"/>
+            <a:ext cx="2286000" cy="2286000"/>
           </a:xfrm>
           <a:prstGeom prst="ellipse">
             <a:avLst/>
           </a:prstGeom>
           <a:solidFill>
-            <a:srgbClr val="F5D4CC"/>
+            <a:srgbClr val="F6DCD5"/>
           </a:solidFill>
           <a:ln w="19050">
-            <a:solidFill>
-              <a:srgbClr val="AE4329"/>
-            </a:solidFill>
+            <a:noFill/>
             <a:prstDash val="dash"/>
           </a:ln>
         </p:spPr>
@@ -3717,7 +3874,7 @@
             <a:r>
               <a:rPr sz="1200" b="0" i="0">
                 <a:solidFill>
-                  <a:srgbClr val="5B2315"/>
+                  <a:srgbClr val="8E8780"/>
                 </a:solidFill>
               </a:rPr>
               <a:t>사진</a:t>
@@ -3727,13 +3884,13 @@
       </p:sp>
       <p:sp>
         <p:nvSpPr>
-          <p:cNvPr id="8" name="TextBox 7"/>
+          <p:cNvPr id="10" name="TextBox 9"/>
           <p:cNvSpPr txBox="1"/>
           <p:nvPr/>
         </p:nvSpPr>
         <p:spPr>
           <a:xfrm>
-            <a:off x="4353458" y="4091939"/>
+            <a:off x="4353458" y="4160520"/>
             <a:ext cx="3484778" cy="411480"/>
           </a:xfrm>
           <a:prstGeom prst="rect">
@@ -3755,7 +3912,7 @@
             <a:r>
               <a:rPr sz="1600" b="1" i="0">
                 <a:solidFill>
-                  <a:srgbClr val="5B2315"/>
+                  <a:srgbClr val="492E27"/>
                 </a:solidFill>
               </a:rPr>
               <a:t>보호자 2</a:t>
@@ -3765,14 +3922,14 @@
       </p:sp>
       <p:sp>
         <p:nvSpPr>
-          <p:cNvPr id="9" name="TextBox 8"/>
+          <p:cNvPr id="11" name="TextBox 10"/>
           <p:cNvSpPr txBox="1"/>
           <p:nvPr/>
         </p:nvSpPr>
         <p:spPr>
           <a:xfrm>
-            <a:off x="4444898" y="4549140"/>
-            <a:ext cx="3301898" cy="1851660"/>
+            <a:off x="4444898" y="4617720"/>
+            <a:ext cx="3301898" cy="1737360"/>
           </a:xfrm>
           <a:prstGeom prst="rect">
             <a:avLst/>
@@ -3833,25 +3990,23 @@
       </p:sp>
       <p:sp>
         <p:nvSpPr>
-          <p:cNvPr id="10" name="사진 자리"/>
+          <p:cNvPr id="12" name="사진 자리"/>
           <p:cNvSpPr/>
           <p:nvPr/>
         </p:nvSpPr>
         <p:spPr>
           <a:xfrm>
-            <a:off x="8609076" y="1600200"/>
-            <a:ext cx="2400300" cy="2400300"/>
+            <a:off x="8666226" y="1783080"/>
+            <a:ext cx="2286000" cy="2286000"/>
           </a:xfrm>
           <a:prstGeom prst="ellipse">
             <a:avLst/>
           </a:prstGeom>
           <a:solidFill>
-            <a:srgbClr val="F5D4CC"/>
+            <a:srgbClr val="F6DCD5"/>
           </a:solidFill>
           <a:ln w="19050">
-            <a:solidFill>
-              <a:srgbClr val="AE4329"/>
-            </a:solidFill>
+            <a:noFill/>
             <a:prstDash val="dash"/>
           </a:ln>
         </p:spPr>
@@ -3869,7 +4024,7 @@
             <a:r>
               <a:rPr sz="1200" b="0" i="0">
                 <a:solidFill>
-                  <a:srgbClr val="5B2315"/>
+                  <a:srgbClr val="8E8780"/>
                 </a:solidFill>
               </a:rPr>
               <a:t>사진</a:t>
@@ -3879,13 +4034,13 @@
       </p:sp>
       <p:sp>
         <p:nvSpPr>
-          <p:cNvPr id="11" name="TextBox 10"/>
+          <p:cNvPr id="13" name="TextBox 12"/>
           <p:cNvSpPr txBox="1"/>
           <p:nvPr/>
         </p:nvSpPr>
         <p:spPr>
           <a:xfrm>
-            <a:off x="8066836" y="4091939"/>
+            <a:off x="8066836" y="4160520"/>
             <a:ext cx="3484778" cy="411480"/>
           </a:xfrm>
           <a:prstGeom prst="rect">
@@ -3907,7 +4062,7 @@
             <a:r>
               <a:rPr sz="1600" b="1" i="0">
                 <a:solidFill>
-                  <a:srgbClr val="5B2315"/>
+                  <a:srgbClr val="492E27"/>
                 </a:solidFill>
               </a:rPr>
               <a:t>우리 반려동물</a:t>
@@ -3917,14 +4072,14 @@
       </p:sp>
       <p:sp>
         <p:nvSpPr>
-          <p:cNvPr id="12" name="TextBox 11"/>
+          <p:cNvPr id="14" name="TextBox 13"/>
           <p:cNvSpPr txBox="1"/>
           <p:nvPr/>
         </p:nvSpPr>
         <p:spPr>
           <a:xfrm>
-            <a:off x="8158276" y="4549140"/>
-            <a:ext cx="3301898" cy="1851660"/>
+            <a:off x="8158276" y="4617720"/>
+            <a:ext cx="3301898" cy="1737360"/>
           </a:xfrm>
           <a:prstGeom prst="rect">
             <a:avLst/>
@@ -3997,7 +4152,7 @@
     <p:bg>
       <p:bgPr>
         <a:solidFill>
-          <a:srgbClr val="FBF1EE"/>
+          <a:srgbClr val="FBEFEC"/>
         </a:solidFill>
         <a:effectLst/>
       </p:bgPr>
@@ -4016,18 +4171,15 @@
           <p:nvPr/>
         </p:nvSpPr>
         <p:spPr>
-          <a:xfrm rot="10800000">
-            <a:off x="10637215" y="0"/>
-            <a:ext cx="914400" cy="1554480"/>
-          </a:xfrm>
-          <a:prstGeom prst="round2SameRect">
-            <a:avLst>
-              <a:gd name="adj1" fmla="val 50000"/>
-              <a:gd name="adj2" fmla="val 0"/>
-            </a:avLst>
+          <a:xfrm>
+            <a:off x="640080" y="566928"/>
+            <a:ext cx="10911535" cy="10972"/>
+          </a:xfrm>
+          <a:prstGeom prst="rect">
+            <a:avLst/>
           </a:prstGeom>
           <a:solidFill>
-            <a:srgbClr val="F5D4CC"/>
+            <a:srgbClr val="26231F"/>
           </a:solidFill>
           <a:ln>
             <a:noFill/>
@@ -4043,6 +4195,73 @@
       </p:sp>
       <p:sp>
         <p:nvSpPr>
+          <p:cNvPr id="4" name="상단 라벨"/>
+          <p:cNvSpPr txBox="1"/>
+          <p:nvPr/>
+        </p:nvSpPr>
+        <p:spPr>
+          <a:xfrm>
+            <a:off x="640080" y="237744"/>
+            <a:ext cx="5486400" cy="274320"/>
+          </a:xfrm>
+          <a:prstGeom prst="rect">
+            <a:avLst/>
+          </a:prstGeom>
+          <a:noFill/>
+        </p:spPr>
+        <p:txBody>
+          <a:bodyPr wrap="square" lIns="54864" rIns="54864" tIns="27432" bIns="27432" anchor="ctr">
+            <a:noAutofit/>
+          </a:bodyPr>
+          <a:lstStyle/>
+          <a:p>
+            <a:pPr algn="l">
+              <a:lnSpc>
+                <a:spcPct val="115000"/>
+              </a:lnSpc>
+            </a:pPr>
+            <a:r>
+              <a:rPr sz="900" b="1" i="0" spc="250">
+                <a:solidFill>
+                  <a:srgbClr val="26231F"/>
+                </a:solidFill>
+              </a:rPr>
+              <a:t>FAMILY ALBUM</a:t>
+            </a:r>
+          </a:p>
+        </p:txBody>
+      </p:sp>
+      <p:sp>
+        <p:nvSpPr>
+          <p:cNvPr id="5" name="포인트"/>
+          <p:cNvSpPr/>
+          <p:nvPr/>
+        </p:nvSpPr>
+        <p:spPr>
+          <a:xfrm>
+            <a:off x="11204143" y="246888"/>
+            <a:ext cx="237744" cy="237744"/>
+          </a:xfrm>
+          <a:prstGeom prst="moon">
+            <a:avLst/>
+          </a:prstGeom>
+          <a:solidFill>
+            <a:srgbClr val="D88C79"/>
+          </a:solidFill>
+          <a:ln>
+            <a:noFill/>
+          </a:ln>
+        </p:spPr>
+        <p:txBody>
+          <a:bodyPr rtlCol="0" anchor="ctr"/>
+          <a:lstStyle/>
+          <a:p>
+            <a:pPr algn="ctr"/>
+          </a:p>
+        </p:txBody>
+      </p:sp>
+      <p:sp>
+        <p:nvSpPr>
           <p:cNvPr id="2" name="Title 1"/>
           <p:cNvSpPr>
             <a:spLocks noGrp="1"/>
@@ -4053,8 +4272,8 @@
         </p:nvSpPr>
         <p:spPr>
           <a:xfrm>
-            <a:off x="640080" y="457200"/>
-            <a:ext cx="9722815" cy="868680"/>
+            <a:off x="640080" y="731520"/>
+            <a:ext cx="10911535" cy="822960"/>
           </a:xfrm>
         </p:spPr>
         <p:txBody>
@@ -4071,7 +4290,7 @@
             <a:r>
               <a:rPr sz="3000" b="1" i="0">
                 <a:solidFill>
-                  <a:srgbClr val="5B2315"/>
+                  <a:srgbClr val="26231F"/>
                 </a:solidFill>
               </a:rPr>
               <a:t>우리 가족 이야기</a:t>
@@ -4081,20 +4300,20 @@
       </p:sp>
       <p:sp>
         <p:nvSpPr>
-          <p:cNvPr id="4" name="타임라인 선"/>
+          <p:cNvPr id="6" name="타임라인 선"/>
           <p:cNvSpPr/>
           <p:nvPr/>
         </p:nvSpPr>
         <p:spPr>
           <a:xfrm>
-            <a:off x="640080" y="3337560"/>
+            <a:off x="640080" y="3520440"/>
             <a:ext cx="10911535" cy="54864"/>
           </a:xfrm>
           <a:prstGeom prst="rect">
             <a:avLst/>
           </a:prstGeom>
           <a:solidFill>
-            <a:srgbClr val="F5D4CC"/>
+            <a:srgbClr val="F6DCD5"/>
           </a:solidFill>
           <a:ln>
             <a:noFill/>
@@ -4110,20 +4329,20 @@
       </p:sp>
       <p:sp>
         <p:nvSpPr>
-          <p:cNvPr id="5" name="때 1"/>
+          <p:cNvPr id="7" name="때 1"/>
           <p:cNvSpPr/>
           <p:nvPr/>
         </p:nvSpPr>
         <p:spPr>
           <a:xfrm>
-            <a:off x="1802853" y="3154680"/>
+            <a:off x="1802853" y="3337560"/>
             <a:ext cx="402336" cy="402336"/>
           </a:xfrm>
           <a:prstGeom prst="ellipse">
             <a:avLst/>
           </a:prstGeom>
           <a:solidFill>
-            <a:srgbClr val="AE4329"/>
+            <a:srgbClr val="D88C79"/>
           </a:solidFill>
           <a:ln w="38100">
             <a:solidFill>
@@ -4141,13 +4360,13 @@
       </p:sp>
       <p:sp>
         <p:nvSpPr>
-          <p:cNvPr id="6" name="TextBox 5"/>
+          <p:cNvPr id="8" name="TextBox 7"/>
           <p:cNvSpPr txBox="1"/>
           <p:nvPr/>
         </p:nvSpPr>
         <p:spPr>
           <a:xfrm>
-            <a:off x="685800" y="2514600"/>
+            <a:off x="685800" y="2697480"/>
             <a:ext cx="2636443" cy="457200"/>
           </a:xfrm>
           <a:prstGeom prst="rect">
@@ -4169,7 +4388,7 @@
             <a:r>
               <a:rPr sz="1600" b="1" i="0">
                 <a:solidFill>
-                  <a:srgbClr val="AE4329"/>
+                  <a:srgbClr val="D88C79"/>
                 </a:solidFill>
               </a:rPr>
               <a:t>처음 만난 날</a:t>
@@ -4179,13 +4398,13 @@
       </p:sp>
       <p:sp>
         <p:nvSpPr>
-          <p:cNvPr id="7" name="TextBox 6"/>
+          <p:cNvPr id="9" name="TextBox 8"/>
           <p:cNvSpPr txBox="1"/>
           <p:nvPr/>
         </p:nvSpPr>
         <p:spPr>
           <a:xfrm>
-            <a:off x="731519" y="3703320"/>
+            <a:off x="731519" y="3886200"/>
             <a:ext cx="2545003" cy="457200"/>
           </a:xfrm>
           <a:prstGeom prst="rect">
@@ -4207,7 +4426,7 @@
             <a:r>
               <a:rPr sz="1800" b="1" i="0">
                 <a:solidFill>
-                  <a:srgbClr val="5B2315"/>
+                  <a:srgbClr val="492E27"/>
                 </a:solidFill>
               </a:rPr>
               <a:t>우리의 인연</a:t>
@@ -4217,13 +4436,13 @@
       </p:sp>
       <p:sp>
         <p:nvSpPr>
-          <p:cNvPr id="8" name="TextBox 7"/>
+          <p:cNvPr id="10" name="TextBox 9"/>
           <p:cNvSpPr txBox="1"/>
           <p:nvPr/>
         </p:nvSpPr>
         <p:spPr>
           <a:xfrm>
-            <a:off x="731519" y="4206240"/>
+            <a:off x="731519" y="4389120"/>
             <a:ext cx="2545003" cy="1645920"/>
           </a:xfrm>
           <a:prstGeom prst="rect">
@@ -4245,7 +4464,7 @@
             <a:r>
               <a:rPr sz="1500" b="0" i="0">
                 <a:solidFill>
-                  <a:srgbClr val="2B2B2B"/>
+                  <a:srgbClr val="26231F"/>
                 </a:solidFill>
               </a:rPr>
               <a:t>입양하던 날의 이야기</a:t>
@@ -4255,20 +4474,20 @@
       </p:sp>
       <p:sp>
         <p:nvSpPr>
-          <p:cNvPr id="9" name="때 2"/>
+          <p:cNvPr id="11" name="때 2"/>
           <p:cNvSpPr/>
           <p:nvPr/>
         </p:nvSpPr>
         <p:spPr>
           <a:xfrm>
-            <a:off x="4530737" y="3154680"/>
+            <a:off x="4530737" y="3337560"/>
             <a:ext cx="402336" cy="402336"/>
           </a:xfrm>
           <a:prstGeom prst="ellipse">
             <a:avLst/>
           </a:prstGeom>
           <a:solidFill>
-            <a:srgbClr val="AE4329"/>
+            <a:srgbClr val="D88C79"/>
           </a:solidFill>
           <a:ln w="38100">
             <a:solidFill>
@@ -4286,13 +4505,13 @@
       </p:sp>
       <p:sp>
         <p:nvSpPr>
-          <p:cNvPr id="10" name="TextBox 9"/>
+          <p:cNvPr id="12" name="TextBox 11"/>
           <p:cNvSpPr txBox="1"/>
           <p:nvPr/>
         </p:nvSpPr>
         <p:spPr>
           <a:xfrm>
-            <a:off x="3413683" y="2514600"/>
+            <a:off x="3413683" y="2697480"/>
             <a:ext cx="2636443" cy="457200"/>
           </a:xfrm>
           <a:prstGeom prst="rect">
@@ -4314,7 +4533,7 @@
             <a:r>
               <a:rPr sz="1600" b="1" i="0">
                 <a:solidFill>
-                  <a:srgbClr val="AE4329"/>
+                  <a:srgbClr val="D88C79"/>
                 </a:solidFill>
               </a:rPr>
               <a:t>첫 산책</a:t>
@@ -4324,13 +4543,13 @@
       </p:sp>
       <p:sp>
         <p:nvSpPr>
-          <p:cNvPr id="11" name="TextBox 10"/>
+          <p:cNvPr id="13" name="TextBox 12"/>
           <p:cNvSpPr txBox="1"/>
           <p:nvPr/>
         </p:nvSpPr>
         <p:spPr>
           <a:xfrm>
-            <a:off x="3459403" y="3703320"/>
+            <a:off x="3459403" y="3886200"/>
             <a:ext cx="2545003" cy="457200"/>
           </a:xfrm>
           <a:prstGeom prst="rect">
@@ -4352,7 +4571,7 @@
             <a:r>
               <a:rPr sz="1800" b="1" i="0">
                 <a:solidFill>
-                  <a:srgbClr val="5B2315"/>
+                  <a:srgbClr val="492E27"/>
                 </a:solidFill>
               </a:rPr>
               <a:t>함께한 첫 걸음</a:t>
@@ -4362,13 +4581,13 @@
       </p:sp>
       <p:sp>
         <p:nvSpPr>
-          <p:cNvPr id="12" name="TextBox 11"/>
+          <p:cNvPr id="14" name="TextBox 13"/>
           <p:cNvSpPr txBox="1"/>
           <p:nvPr/>
         </p:nvSpPr>
         <p:spPr>
           <a:xfrm>
-            <a:off x="3459403" y="4206240"/>
+            <a:off x="3459403" y="4389120"/>
             <a:ext cx="2545003" cy="1645920"/>
           </a:xfrm>
           <a:prstGeom prst="rect">
@@ -4390,7 +4609,7 @@
             <a:r>
               <a:rPr sz="1500" b="0" i="0">
                 <a:solidFill>
-                  <a:srgbClr val="2B2B2B"/>
+                  <a:srgbClr val="26231F"/>
                 </a:solidFill>
               </a:rPr>
               <a:t>그날의 기억을 적어요</a:t>
@@ -4400,20 +4619,20 @@
       </p:sp>
       <p:sp>
         <p:nvSpPr>
-          <p:cNvPr id="13" name="때 3"/>
+          <p:cNvPr id="15" name="때 3"/>
           <p:cNvSpPr/>
           <p:nvPr/>
         </p:nvSpPr>
         <p:spPr>
           <a:xfrm>
-            <a:off x="7258621" y="3154680"/>
+            <a:off x="7258621" y="3337560"/>
             <a:ext cx="402336" cy="402336"/>
           </a:xfrm>
           <a:prstGeom prst="ellipse">
             <a:avLst/>
           </a:prstGeom>
           <a:solidFill>
-            <a:srgbClr val="AE4329"/>
+            <a:srgbClr val="D88C79"/>
           </a:solidFill>
           <a:ln w="38100">
             <a:solidFill>
@@ -4431,13 +4650,13 @@
       </p:sp>
       <p:sp>
         <p:nvSpPr>
-          <p:cNvPr id="14" name="TextBox 13"/>
+          <p:cNvPr id="16" name="TextBox 15"/>
           <p:cNvSpPr txBox="1"/>
           <p:nvPr/>
         </p:nvSpPr>
         <p:spPr>
           <a:xfrm>
-            <a:off x="6141567" y="2514600"/>
+            <a:off x="6141567" y="2697480"/>
             <a:ext cx="2636443" cy="457200"/>
           </a:xfrm>
           <a:prstGeom prst="rect">
@@ -4459,7 +4678,7 @@
             <a:r>
               <a:rPr sz="1600" b="1" i="0">
                 <a:solidFill>
-                  <a:srgbClr val="AE4329"/>
+                  <a:srgbClr val="D88C79"/>
                 </a:solidFill>
               </a:rPr>
               <a:t>가장 웃었던 날</a:t>
@@ -4469,13 +4688,13 @@
       </p:sp>
       <p:sp>
         <p:nvSpPr>
-          <p:cNvPr id="15" name="TextBox 14"/>
+          <p:cNvPr id="17" name="TextBox 16"/>
           <p:cNvSpPr txBox="1"/>
           <p:nvPr/>
         </p:nvSpPr>
         <p:spPr>
           <a:xfrm>
-            <a:off x="6187287" y="3703320"/>
+            <a:off x="6187287" y="3886200"/>
             <a:ext cx="2545003" cy="457200"/>
           </a:xfrm>
           <a:prstGeom prst="rect">
@@ -4497,7 +4716,7 @@
             <a:r>
               <a:rPr sz="1800" b="1" i="0">
                 <a:solidFill>
-                  <a:srgbClr val="5B2315"/>
+                  <a:srgbClr val="492E27"/>
                 </a:solidFill>
               </a:rPr>
               <a:t>잊지 못할 순간</a:t>
@@ -4507,13 +4726,13 @@
       </p:sp>
       <p:sp>
         <p:nvSpPr>
-          <p:cNvPr id="16" name="TextBox 15"/>
+          <p:cNvPr id="18" name="TextBox 17"/>
           <p:cNvSpPr txBox="1"/>
           <p:nvPr/>
         </p:nvSpPr>
         <p:spPr>
           <a:xfrm>
-            <a:off x="6187287" y="4206240"/>
+            <a:off x="6187287" y="4389120"/>
             <a:ext cx="2545003" cy="1645920"/>
           </a:xfrm>
           <a:prstGeom prst="rect">
@@ -4535,7 +4754,7 @@
             <a:r>
               <a:rPr sz="1500" b="0" i="0">
                 <a:solidFill>
-                  <a:srgbClr val="2B2B2B"/>
+                  <a:srgbClr val="26231F"/>
                 </a:solidFill>
               </a:rPr>
               <a:t>사진으로 남겨 두세요</a:t>
@@ -4545,20 +4764,20 @@
       </p:sp>
       <p:sp>
         <p:nvSpPr>
-          <p:cNvPr id="17" name="때 4"/>
+          <p:cNvPr id="19" name="때 4"/>
           <p:cNvSpPr/>
           <p:nvPr/>
         </p:nvSpPr>
         <p:spPr>
           <a:xfrm>
-            <a:off x="9986505" y="3154680"/>
+            <a:off x="9986505" y="3337560"/>
             <a:ext cx="402336" cy="402336"/>
           </a:xfrm>
           <a:prstGeom prst="ellipse">
             <a:avLst/>
           </a:prstGeom>
           <a:solidFill>
-            <a:srgbClr val="AE4329"/>
+            <a:srgbClr val="D88C79"/>
           </a:solidFill>
           <a:ln w="38100">
             <a:solidFill>
@@ -4576,13 +4795,13 @@
       </p:sp>
       <p:sp>
         <p:nvSpPr>
-          <p:cNvPr id="18" name="TextBox 17"/>
+          <p:cNvPr id="20" name="TextBox 19"/>
           <p:cNvSpPr txBox="1"/>
           <p:nvPr/>
         </p:nvSpPr>
         <p:spPr>
           <a:xfrm>
-            <a:off x="8869451" y="2514600"/>
+            <a:off x="8869451" y="2697480"/>
             <a:ext cx="2636443" cy="457200"/>
           </a:xfrm>
           <a:prstGeom prst="rect">
@@ -4604,7 +4823,7 @@
             <a:r>
               <a:rPr sz="1600" b="1" i="0">
                 <a:solidFill>
-                  <a:srgbClr val="AE4329"/>
+                  <a:srgbClr val="D88C79"/>
                 </a:solidFill>
               </a:rPr>
               <a:t>지금</a:t>
@@ -4614,13 +4833,13 @@
       </p:sp>
       <p:sp>
         <p:nvSpPr>
-          <p:cNvPr id="19" name="TextBox 18"/>
+          <p:cNvPr id="21" name="TextBox 20"/>
           <p:cNvSpPr txBox="1"/>
           <p:nvPr/>
         </p:nvSpPr>
         <p:spPr>
           <a:xfrm>
-            <a:off x="8915171" y="3703320"/>
+            <a:off x="8915171" y="3886200"/>
             <a:ext cx="2545003" cy="457200"/>
           </a:xfrm>
           <a:prstGeom prst="rect">
@@ -4642,7 +4861,7 @@
             <a:r>
               <a:rPr sz="1800" b="1" i="0">
                 <a:solidFill>
-                  <a:srgbClr val="5B2315"/>
+                  <a:srgbClr val="492E27"/>
                 </a:solidFill>
               </a:rPr>
               <a:t>오늘의 우리</a:t>
@@ -4652,13 +4871,13 @@
       </p:sp>
       <p:sp>
         <p:nvSpPr>
-          <p:cNvPr id="20" name="TextBox 19"/>
+          <p:cNvPr id="22" name="TextBox 21"/>
           <p:cNvSpPr txBox="1"/>
           <p:nvPr/>
         </p:nvSpPr>
         <p:spPr>
           <a:xfrm>
-            <a:off x="8915171" y="4206240"/>
+            <a:off x="8915171" y="4389120"/>
             <a:ext cx="2545003" cy="1645920"/>
           </a:xfrm>
           <a:prstGeom prst="rect">
@@ -4680,7 +4899,7 @@
             <a:r>
               <a:rPr sz="1500" b="0" i="0">
                 <a:solidFill>
-                  <a:srgbClr val="2B2B2B"/>
+                  <a:srgbClr val="26231F"/>
                 </a:solidFill>
               </a:rPr>
               <a:t>요즘 우리 이야기</a:t>
@@ -4702,7 +4921,7 @@
     <p:bg>
       <p:bgPr>
         <a:solidFill>
-          <a:srgbClr val="FBF1EE"/>
+          <a:srgbClr val="FBEFEC"/>
         </a:solidFill>
         <a:effectLst/>
       </p:bgPr>
@@ -4721,18 +4940,15 @@
           <p:nvPr/>
         </p:nvSpPr>
         <p:spPr>
-          <a:xfrm rot="10800000">
-            <a:off x="10637215" y="0"/>
-            <a:ext cx="914400" cy="1554480"/>
-          </a:xfrm>
-          <a:prstGeom prst="round2SameRect">
-            <a:avLst>
-              <a:gd name="adj1" fmla="val 50000"/>
-              <a:gd name="adj2" fmla="val 0"/>
-            </a:avLst>
+          <a:xfrm>
+            <a:off x="640080" y="566928"/>
+            <a:ext cx="10911535" cy="10972"/>
+          </a:xfrm>
+          <a:prstGeom prst="rect">
+            <a:avLst/>
           </a:prstGeom>
           <a:solidFill>
-            <a:srgbClr val="F5D4CC"/>
+            <a:srgbClr val="26231F"/>
           </a:solidFill>
           <a:ln>
             <a:noFill/>
@@ -4748,6 +4964,73 @@
       </p:sp>
       <p:sp>
         <p:nvSpPr>
+          <p:cNvPr id="4" name="상단 라벨"/>
+          <p:cNvSpPr txBox="1"/>
+          <p:nvPr/>
+        </p:nvSpPr>
+        <p:spPr>
+          <a:xfrm>
+            <a:off x="640080" y="237744"/>
+            <a:ext cx="5486400" cy="274320"/>
+          </a:xfrm>
+          <a:prstGeom prst="rect">
+            <a:avLst/>
+          </a:prstGeom>
+          <a:noFill/>
+        </p:spPr>
+        <p:txBody>
+          <a:bodyPr wrap="square" lIns="54864" rIns="54864" tIns="27432" bIns="27432" anchor="ctr">
+            <a:noAutofit/>
+          </a:bodyPr>
+          <a:lstStyle/>
+          <a:p>
+            <a:pPr algn="l">
+              <a:lnSpc>
+                <a:spcPct val="115000"/>
+              </a:lnSpc>
+            </a:pPr>
+            <a:r>
+              <a:rPr sz="900" b="1" i="0" spc="250">
+                <a:solidFill>
+                  <a:srgbClr val="26231F"/>
+                </a:solidFill>
+              </a:rPr>
+              <a:t>FAMILY ALBUM</a:t>
+            </a:r>
+          </a:p>
+        </p:txBody>
+      </p:sp>
+      <p:sp>
+        <p:nvSpPr>
+          <p:cNvPr id="5" name="포인트"/>
+          <p:cNvSpPr/>
+          <p:nvPr/>
+        </p:nvSpPr>
+        <p:spPr>
+          <a:xfrm>
+            <a:off x="11204143" y="246888"/>
+            <a:ext cx="237744" cy="237744"/>
+          </a:xfrm>
+          <a:prstGeom prst="moon">
+            <a:avLst/>
+          </a:prstGeom>
+          <a:solidFill>
+            <a:srgbClr val="D88C79"/>
+          </a:solidFill>
+          <a:ln>
+            <a:noFill/>
+          </a:ln>
+        </p:spPr>
+        <p:txBody>
+          <a:bodyPr rtlCol="0" anchor="ctr"/>
+          <a:lstStyle/>
+          <a:p>
+            <a:pPr algn="ctr"/>
+          </a:p>
+        </p:txBody>
+      </p:sp>
+      <p:sp>
+        <p:nvSpPr>
           <p:cNvPr id="2" name="Title 1"/>
           <p:cNvSpPr>
             <a:spLocks noGrp="1"/>
@@ -4758,8 +5041,8 @@
         </p:nvSpPr>
         <p:spPr>
           <a:xfrm>
-            <a:off x="640080" y="457200"/>
-            <a:ext cx="9722815" cy="868680"/>
+            <a:off x="640080" y="731520"/>
+            <a:ext cx="10911535" cy="822960"/>
           </a:xfrm>
         </p:spPr>
         <p:txBody>
@@ -4776,7 +5059,7 @@
             <a:r>
               <a:rPr sz="3000" b="1" i="0">
                 <a:solidFill>
-                  <a:srgbClr val="5B2315"/>
+                  <a:srgbClr val="26231F"/>
                 </a:solidFill>
               </a:rPr>
               <a:t>우리 가족의 약속</a:t>
@@ -4786,27 +5069,25 @@
       </p:sp>
       <p:sp>
         <p:nvSpPr>
-          <p:cNvPr id="4" name="줄 1"/>
+          <p:cNvPr id="6" name="줄 1"/>
           <p:cNvSpPr/>
           <p:nvPr/>
         </p:nvSpPr>
         <p:spPr>
           <a:xfrm>
-            <a:off x="640080" y="1600200"/>
+            <a:off x="640080" y="1783080"/>
             <a:ext cx="10911535" cy="1005840"/>
           </a:xfrm>
           <a:prstGeom prst="roundRect">
             <a:avLst>
-              <a:gd name="adj" fmla="val 8000"/>
+              <a:gd name="adj" fmla="val 7000"/>
             </a:avLst>
           </a:prstGeom>
           <a:solidFill>
-            <a:srgbClr val="FBF1EE"/>
+            <a:srgbClr val="FBEFEC"/>
           </a:solidFill>
-          <a:ln w="12700">
-            <a:solidFill>
-              <a:srgbClr val="F5D4CC"/>
-            </a:solidFill>
+          <a:ln>
+            <a:noFill/>
           </a:ln>
         </p:spPr>
         <p:txBody>
@@ -4819,20 +5100,20 @@
       </p:sp>
       <p:sp>
         <p:nvSpPr>
-          <p:cNvPr id="5" name="번호 1"/>
+          <p:cNvPr id="7" name="번호 1"/>
           <p:cNvSpPr/>
           <p:nvPr/>
         </p:nvSpPr>
         <p:spPr>
           <a:xfrm>
-            <a:off x="822959" y="1874519"/>
+            <a:off x="822959" y="2057400"/>
             <a:ext cx="457200" cy="457200"/>
           </a:xfrm>
           <a:prstGeom prst="ellipse">
             <a:avLst/>
           </a:prstGeom>
           <a:solidFill>
-            <a:srgbClr val="AE4329"/>
+            <a:srgbClr val="D88C79"/>
           </a:solidFill>
           <a:ln>
             <a:noFill/>
@@ -4852,7 +5133,7 @@
             <a:r>
               <a:rPr sz="1600" b="1" i="0">
                 <a:solidFill>
-                  <a:srgbClr val="FFFFFF"/>
+                  <a:srgbClr val="26231F"/>
                 </a:solidFill>
               </a:rPr>
               <a:t>1</a:t>
@@ -4862,13 +5143,13 @@
       </p:sp>
       <p:sp>
         <p:nvSpPr>
-          <p:cNvPr id="6" name="TextBox 5"/>
+          <p:cNvPr id="8" name="TextBox 7"/>
           <p:cNvSpPr txBox="1"/>
           <p:nvPr/>
         </p:nvSpPr>
         <p:spPr>
           <a:xfrm>
-            <a:off x="1508760" y="1645920"/>
+            <a:off x="1508760" y="1828800"/>
             <a:ext cx="2743200" cy="914400"/>
           </a:xfrm>
           <a:prstGeom prst="rect">
@@ -4890,7 +5171,7 @@
             <a:r>
               <a:rPr sz="1800" b="1" i="0">
                 <a:solidFill>
-                  <a:srgbClr val="5B2315"/>
+                  <a:srgbClr val="492E27"/>
                 </a:solidFill>
               </a:rPr>
               <a:t>약속 1</a:t>
@@ -4900,13 +5181,13 @@
       </p:sp>
       <p:sp>
         <p:nvSpPr>
-          <p:cNvPr id="7" name="TextBox 6"/>
+          <p:cNvPr id="9" name="TextBox 8"/>
           <p:cNvSpPr txBox="1"/>
           <p:nvPr/>
         </p:nvSpPr>
         <p:spPr>
           <a:xfrm>
-            <a:off x="4297680" y="1645920"/>
+            <a:off x="4297680" y="1828800"/>
             <a:ext cx="7071055" cy="914400"/>
           </a:xfrm>
           <a:prstGeom prst="rect">
@@ -4928,7 +5209,7 @@
             <a:r>
               <a:rPr sz="1700" b="0" i="0">
                 <a:solidFill>
-                  <a:srgbClr val="2B2B2B"/>
+                  <a:srgbClr val="26231F"/>
                 </a:solidFill>
               </a:rPr>
               <a:t>산책은 하루도 거르지 않기</a:t>
@@ -4938,27 +5219,25 @@
       </p:sp>
       <p:sp>
         <p:nvSpPr>
-          <p:cNvPr id="8" name="줄 2"/>
+          <p:cNvPr id="10" name="줄 2"/>
           <p:cNvSpPr/>
           <p:nvPr/>
         </p:nvSpPr>
         <p:spPr>
           <a:xfrm>
-            <a:off x="640080" y="2743200"/>
+            <a:off x="640080" y="2926080"/>
             <a:ext cx="10911535" cy="1005840"/>
           </a:xfrm>
           <a:prstGeom prst="roundRect">
             <a:avLst>
-              <a:gd name="adj" fmla="val 8000"/>
+              <a:gd name="adj" fmla="val 7000"/>
             </a:avLst>
           </a:prstGeom>
           <a:solidFill>
-            <a:srgbClr val="FBF1EE"/>
+            <a:srgbClr val="FBEFEC"/>
           </a:solidFill>
-          <a:ln w="12700">
-            <a:solidFill>
-              <a:srgbClr val="F5D4CC"/>
-            </a:solidFill>
+          <a:ln>
+            <a:noFill/>
           </a:ln>
         </p:spPr>
         <p:txBody>
@@ -4971,20 +5250,20 @@
       </p:sp>
       <p:sp>
         <p:nvSpPr>
-          <p:cNvPr id="9" name="번호 2"/>
+          <p:cNvPr id="11" name="번호 2"/>
           <p:cNvSpPr/>
           <p:nvPr/>
         </p:nvSpPr>
         <p:spPr>
           <a:xfrm>
-            <a:off x="822959" y="3017520"/>
+            <a:off x="822959" y="3200400"/>
             <a:ext cx="457200" cy="457200"/>
           </a:xfrm>
           <a:prstGeom prst="ellipse">
             <a:avLst/>
           </a:prstGeom>
           <a:solidFill>
-            <a:srgbClr val="AE4329"/>
+            <a:srgbClr val="D88C79"/>
           </a:solidFill>
           <a:ln>
             <a:noFill/>
@@ -5004,7 +5283,7 @@
             <a:r>
               <a:rPr sz="1600" b="1" i="0">
                 <a:solidFill>
-                  <a:srgbClr val="FFFFFF"/>
+                  <a:srgbClr val="26231F"/>
                 </a:solidFill>
               </a:rPr>
               <a:t>2</a:t>
@@ -5014,13 +5293,13 @@
       </p:sp>
       <p:sp>
         <p:nvSpPr>
-          <p:cNvPr id="10" name="TextBox 9"/>
+          <p:cNvPr id="12" name="TextBox 11"/>
           <p:cNvSpPr txBox="1"/>
           <p:nvPr/>
         </p:nvSpPr>
         <p:spPr>
           <a:xfrm>
-            <a:off x="1508760" y="2788920"/>
+            <a:off x="1508760" y="2971800"/>
             <a:ext cx="2743200" cy="914400"/>
           </a:xfrm>
           <a:prstGeom prst="rect">
@@ -5042,7 +5321,7 @@
             <a:r>
               <a:rPr sz="1800" b="1" i="0">
                 <a:solidFill>
-                  <a:srgbClr val="5B2315"/>
+                  <a:srgbClr val="492E27"/>
                 </a:solidFill>
               </a:rPr>
               <a:t>약속 2</a:t>
@@ -5052,13 +5331,13 @@
       </p:sp>
       <p:sp>
         <p:nvSpPr>
-          <p:cNvPr id="11" name="TextBox 10"/>
+          <p:cNvPr id="13" name="TextBox 12"/>
           <p:cNvSpPr txBox="1"/>
           <p:nvPr/>
         </p:nvSpPr>
         <p:spPr>
           <a:xfrm>
-            <a:off x="4297680" y="2788920"/>
+            <a:off x="4297680" y="2971800"/>
             <a:ext cx="7071055" cy="914400"/>
           </a:xfrm>
           <a:prstGeom prst="rect">
@@ -5080,7 +5359,7 @@
             <a:r>
               <a:rPr sz="1700" b="0" i="0">
                 <a:solidFill>
-                  <a:srgbClr val="2B2B2B"/>
+                  <a:srgbClr val="26231F"/>
                 </a:solidFill>
               </a:rPr>
               <a:t>건강 검진 날짜 챙기기</a:t>
@@ -5090,27 +5369,25 @@
       </p:sp>
       <p:sp>
         <p:nvSpPr>
-          <p:cNvPr id="12" name="줄 3"/>
+          <p:cNvPr id="14" name="줄 3"/>
           <p:cNvSpPr/>
           <p:nvPr/>
         </p:nvSpPr>
         <p:spPr>
           <a:xfrm>
-            <a:off x="640080" y="3886200"/>
+            <a:off x="640080" y="4069080"/>
             <a:ext cx="10911535" cy="1005840"/>
           </a:xfrm>
           <a:prstGeom prst="roundRect">
             <a:avLst>
-              <a:gd name="adj" fmla="val 8000"/>
+              <a:gd name="adj" fmla="val 7000"/>
             </a:avLst>
           </a:prstGeom>
           <a:solidFill>
-            <a:srgbClr val="FBF1EE"/>
+            <a:srgbClr val="FBEFEC"/>
           </a:solidFill>
-          <a:ln w="12700">
-            <a:solidFill>
-              <a:srgbClr val="F5D4CC"/>
-            </a:solidFill>
+          <a:ln>
+            <a:noFill/>
           </a:ln>
         </p:spPr>
         <p:txBody>
@@ -5123,20 +5400,20 @@
       </p:sp>
       <p:sp>
         <p:nvSpPr>
-          <p:cNvPr id="13" name="번호 3"/>
+          <p:cNvPr id="15" name="번호 3"/>
           <p:cNvSpPr/>
           <p:nvPr/>
         </p:nvSpPr>
         <p:spPr>
           <a:xfrm>
-            <a:off x="822959" y="4160520"/>
+            <a:off x="822959" y="4343400"/>
             <a:ext cx="457200" cy="457200"/>
           </a:xfrm>
           <a:prstGeom prst="ellipse">
             <a:avLst/>
           </a:prstGeom>
           <a:solidFill>
-            <a:srgbClr val="AE4329"/>
+            <a:srgbClr val="D88C79"/>
           </a:solidFill>
           <a:ln>
             <a:noFill/>
@@ -5156,7 +5433,7 @@
             <a:r>
               <a:rPr sz="1600" b="1" i="0">
                 <a:solidFill>
-                  <a:srgbClr val="FFFFFF"/>
+                  <a:srgbClr val="26231F"/>
                 </a:solidFill>
               </a:rPr>
               <a:t>3</a:t>
@@ -5166,13 +5443,13 @@
       </p:sp>
       <p:sp>
         <p:nvSpPr>
-          <p:cNvPr id="14" name="TextBox 13"/>
+          <p:cNvPr id="16" name="TextBox 15"/>
           <p:cNvSpPr txBox="1"/>
           <p:nvPr/>
         </p:nvSpPr>
         <p:spPr>
           <a:xfrm>
-            <a:off x="1508760" y="3931920"/>
+            <a:off x="1508760" y="4114800"/>
             <a:ext cx="2743200" cy="914400"/>
           </a:xfrm>
           <a:prstGeom prst="rect">
@@ -5194,7 +5471,7 @@
             <a:r>
               <a:rPr sz="1800" b="1" i="0">
                 <a:solidFill>
-                  <a:srgbClr val="5B2315"/>
+                  <a:srgbClr val="492E27"/>
                 </a:solidFill>
               </a:rPr>
               <a:t>약속 3</a:t>
@@ -5204,13 +5481,13 @@
       </p:sp>
       <p:sp>
         <p:nvSpPr>
-          <p:cNvPr id="15" name="TextBox 14"/>
+          <p:cNvPr id="17" name="TextBox 16"/>
           <p:cNvSpPr txBox="1"/>
           <p:nvPr/>
         </p:nvSpPr>
         <p:spPr>
           <a:xfrm>
-            <a:off x="4297680" y="3931920"/>
+            <a:off x="4297680" y="4114800"/>
             <a:ext cx="7071055" cy="914400"/>
           </a:xfrm>
           <a:prstGeom prst="rect">
@@ -5232,7 +5509,7 @@
             <a:r>
               <a:rPr sz="1700" b="0" i="0">
                 <a:solidFill>
-                  <a:srgbClr val="2B2B2B"/>
+                  <a:srgbClr val="26231F"/>
                 </a:solidFill>
               </a:rPr>
               <a:t>많이 안아 주고 많이 칭찬하기</a:t>
@@ -5254,7 +5531,7 @@
     <p:bg>
       <p:bgPr>
         <a:solidFill>
-          <a:srgbClr val="FBF1EE"/>
+          <a:srgbClr val="FBEFEC"/>
         </a:solidFill>
         <a:effectLst/>
       </p:bgPr>
@@ -5273,18 +5550,15 @@
           <p:nvPr/>
         </p:nvSpPr>
         <p:spPr>
-          <a:xfrm rot="10800000">
-            <a:off x="10637215" y="0"/>
-            <a:ext cx="914400" cy="1554480"/>
-          </a:xfrm>
-          <a:prstGeom prst="round2SameRect">
-            <a:avLst>
-              <a:gd name="adj1" fmla="val 50000"/>
-              <a:gd name="adj2" fmla="val 0"/>
-            </a:avLst>
+          <a:xfrm>
+            <a:off x="640080" y="566928"/>
+            <a:ext cx="10911535" cy="10972"/>
+          </a:xfrm>
+          <a:prstGeom prst="rect">
+            <a:avLst/>
           </a:prstGeom>
           <a:solidFill>
-            <a:srgbClr val="F5D4CC"/>
+            <a:srgbClr val="26231F"/>
           </a:solidFill>
           <a:ln>
             <a:noFill/>
@@ -5300,6 +5574,73 @@
       </p:sp>
       <p:sp>
         <p:nvSpPr>
+          <p:cNvPr id="4" name="상단 라벨"/>
+          <p:cNvSpPr txBox="1"/>
+          <p:nvPr/>
+        </p:nvSpPr>
+        <p:spPr>
+          <a:xfrm>
+            <a:off x="640080" y="237744"/>
+            <a:ext cx="5486400" cy="274320"/>
+          </a:xfrm>
+          <a:prstGeom prst="rect">
+            <a:avLst/>
+          </a:prstGeom>
+          <a:noFill/>
+        </p:spPr>
+        <p:txBody>
+          <a:bodyPr wrap="square" lIns="54864" rIns="54864" tIns="27432" bIns="27432" anchor="ctr">
+            <a:noAutofit/>
+          </a:bodyPr>
+          <a:lstStyle/>
+          <a:p>
+            <a:pPr algn="l">
+              <a:lnSpc>
+                <a:spcPct val="115000"/>
+              </a:lnSpc>
+            </a:pPr>
+            <a:r>
+              <a:rPr sz="900" b="1" i="0" spc="250">
+                <a:solidFill>
+                  <a:srgbClr val="26231F"/>
+                </a:solidFill>
+              </a:rPr>
+              <a:t>FAMILY ALBUM</a:t>
+            </a:r>
+          </a:p>
+        </p:txBody>
+      </p:sp>
+      <p:sp>
+        <p:nvSpPr>
+          <p:cNvPr id="5" name="포인트"/>
+          <p:cNvSpPr/>
+          <p:nvPr/>
+        </p:nvSpPr>
+        <p:spPr>
+          <a:xfrm>
+            <a:off x="11204143" y="246888"/>
+            <a:ext cx="237744" cy="237744"/>
+          </a:xfrm>
+          <a:prstGeom prst="moon">
+            <a:avLst/>
+          </a:prstGeom>
+          <a:solidFill>
+            <a:srgbClr val="D88C79"/>
+          </a:solidFill>
+          <a:ln>
+            <a:noFill/>
+          </a:ln>
+        </p:spPr>
+        <p:txBody>
+          <a:bodyPr rtlCol="0" anchor="ctr"/>
+          <a:lstStyle/>
+          <a:p>
+            <a:pPr algn="ctr"/>
+          </a:p>
+        </p:txBody>
+      </p:sp>
+      <p:sp>
+        <p:nvSpPr>
           <p:cNvPr id="2" name="Title 1"/>
           <p:cNvSpPr>
             <a:spLocks noGrp="1"/>
@@ -5310,8 +5651,8 @@
         </p:nvSpPr>
         <p:spPr>
           <a:xfrm>
-            <a:off x="640080" y="457200"/>
-            <a:ext cx="9722815" cy="868680"/>
+            <a:off x="640080" y="731520"/>
+            <a:ext cx="10911535" cy="822960"/>
           </a:xfrm>
         </p:spPr>
         <p:txBody>
@@ -5328,7 +5669,7 @@
             <a:r>
               <a:rPr sz="3000" b="1" i="0">
                 <a:solidFill>
-                  <a:srgbClr val="5B2315"/>
+                  <a:srgbClr val="26231F"/>
                 </a:solidFill>
               </a:rPr>
               <a:t>가족 사진</a:t>
@@ -5338,14 +5679,14 @@
       </p:sp>
       <p:sp>
         <p:nvSpPr>
-          <p:cNvPr id="4" name="사진 자리"/>
+          <p:cNvPr id="6" name="사진 자리"/>
           <p:cNvSpPr/>
           <p:nvPr/>
         </p:nvSpPr>
         <p:spPr>
           <a:xfrm>
-            <a:off x="640080" y="1600200"/>
-            <a:ext cx="3515258" cy="2308860"/>
+            <a:off x="640080" y="1783080"/>
+            <a:ext cx="3515258" cy="2194560"/>
           </a:xfrm>
           <a:prstGeom prst="roundRect">
             <a:avLst>
@@ -5353,12 +5694,10 @@
             </a:avLst>
           </a:prstGeom>
           <a:solidFill>
-            <a:srgbClr val="F5D4CC"/>
+            <a:srgbClr val="F6DCD5"/>
           </a:solidFill>
           <a:ln w="19050">
-            <a:solidFill>
-              <a:srgbClr val="AE4329"/>
-            </a:solidFill>
+            <a:noFill/>
             <a:prstDash val="dash"/>
           </a:ln>
         </p:spPr>
@@ -5376,7 +5715,7 @@
             <a:r>
               <a:rPr sz="1200" b="0" i="0">
                 <a:solidFill>
-                  <a:srgbClr val="5B2315"/>
+                  <a:srgbClr val="8E8780"/>
                 </a:solidFill>
               </a:rPr>
               <a:t>사진 1</a:t>
@@ -5386,14 +5725,14 @@
       </p:sp>
       <p:sp>
         <p:nvSpPr>
-          <p:cNvPr id="5" name="사진 자리"/>
+          <p:cNvPr id="7" name="사진 자리"/>
           <p:cNvSpPr/>
           <p:nvPr/>
         </p:nvSpPr>
         <p:spPr>
           <a:xfrm>
-            <a:off x="4338218" y="1600200"/>
-            <a:ext cx="3515258" cy="2308860"/>
+            <a:off x="4338218" y="1783080"/>
+            <a:ext cx="3515258" cy="2194560"/>
           </a:xfrm>
           <a:prstGeom prst="roundRect">
             <a:avLst>
@@ -5401,12 +5740,10 @@
             </a:avLst>
           </a:prstGeom>
           <a:solidFill>
-            <a:srgbClr val="F5D4CC"/>
+            <a:srgbClr val="F6DCD5"/>
           </a:solidFill>
           <a:ln w="19050">
-            <a:solidFill>
-              <a:srgbClr val="AE4329"/>
-            </a:solidFill>
+            <a:noFill/>
             <a:prstDash val="dash"/>
           </a:ln>
         </p:spPr>
@@ -5424,7 +5761,7 @@
             <a:r>
               <a:rPr sz="1200" b="0" i="0">
                 <a:solidFill>
-                  <a:srgbClr val="5B2315"/>
+                  <a:srgbClr val="8E8780"/>
                 </a:solidFill>
               </a:rPr>
               <a:t>사진 2</a:t>
@@ -5434,14 +5771,14 @@
       </p:sp>
       <p:sp>
         <p:nvSpPr>
-          <p:cNvPr id="6" name="사진 자리"/>
+          <p:cNvPr id="8" name="사진 자리"/>
           <p:cNvSpPr/>
           <p:nvPr/>
         </p:nvSpPr>
         <p:spPr>
           <a:xfrm>
-            <a:off x="8036356" y="1600200"/>
-            <a:ext cx="3515258" cy="2308860"/>
+            <a:off x="8036356" y="1783080"/>
+            <a:ext cx="3515258" cy="2194560"/>
           </a:xfrm>
           <a:prstGeom prst="roundRect">
             <a:avLst>
@@ -5449,12 +5786,10 @@
             </a:avLst>
           </a:prstGeom>
           <a:solidFill>
-            <a:srgbClr val="F5D4CC"/>
+            <a:srgbClr val="F6DCD5"/>
           </a:solidFill>
           <a:ln w="19050">
-            <a:solidFill>
-              <a:srgbClr val="AE4329"/>
-            </a:solidFill>
+            <a:noFill/>
             <a:prstDash val="dash"/>
           </a:ln>
         </p:spPr>
@@ -5472,7 +5807,7 @@
             <a:r>
               <a:rPr sz="1200" b="0" i="0">
                 <a:solidFill>
-                  <a:srgbClr val="5B2315"/>
+                  <a:srgbClr val="8E8780"/>
                 </a:solidFill>
               </a:rPr>
               <a:t>사진 3</a:t>
@@ -5482,14 +5817,14 @@
       </p:sp>
       <p:sp>
         <p:nvSpPr>
-          <p:cNvPr id="7" name="사진 자리"/>
+          <p:cNvPr id="9" name="사진 자리"/>
           <p:cNvSpPr/>
           <p:nvPr/>
         </p:nvSpPr>
         <p:spPr>
           <a:xfrm>
-            <a:off x="640080" y="4091939"/>
-            <a:ext cx="3515258" cy="2308860"/>
+            <a:off x="640080" y="4160520"/>
+            <a:ext cx="3515258" cy="2194560"/>
           </a:xfrm>
           <a:prstGeom prst="roundRect">
             <a:avLst>
@@ -5497,12 +5832,10 @@
             </a:avLst>
           </a:prstGeom>
           <a:solidFill>
-            <a:srgbClr val="F5D4CC"/>
+            <a:srgbClr val="F6DCD5"/>
           </a:solidFill>
           <a:ln w="19050">
-            <a:solidFill>
-              <a:srgbClr val="AE4329"/>
-            </a:solidFill>
+            <a:noFill/>
             <a:prstDash val="dash"/>
           </a:ln>
         </p:spPr>
@@ -5520,7 +5853,7 @@
             <a:r>
               <a:rPr sz="1200" b="0" i="0">
                 <a:solidFill>
-                  <a:srgbClr val="5B2315"/>
+                  <a:srgbClr val="8E8780"/>
                 </a:solidFill>
               </a:rPr>
               <a:t>사진 4</a:t>
@@ -5530,14 +5863,14 @@
       </p:sp>
       <p:sp>
         <p:nvSpPr>
-          <p:cNvPr id="8" name="사진 자리"/>
+          <p:cNvPr id="10" name="사진 자리"/>
           <p:cNvSpPr/>
           <p:nvPr/>
         </p:nvSpPr>
         <p:spPr>
           <a:xfrm>
-            <a:off x="4338218" y="4091939"/>
-            <a:ext cx="3515258" cy="2308860"/>
+            <a:off x="4338218" y="4160520"/>
+            <a:ext cx="3515258" cy="2194560"/>
           </a:xfrm>
           <a:prstGeom prst="roundRect">
             <a:avLst>
@@ -5545,12 +5878,10 @@
             </a:avLst>
           </a:prstGeom>
           <a:solidFill>
-            <a:srgbClr val="F5D4CC"/>
+            <a:srgbClr val="F6DCD5"/>
           </a:solidFill>
           <a:ln w="19050">
-            <a:solidFill>
-              <a:srgbClr val="AE4329"/>
-            </a:solidFill>
+            <a:noFill/>
             <a:prstDash val="dash"/>
           </a:ln>
         </p:spPr>
@@ -5568,7 +5899,7 @@
             <a:r>
               <a:rPr sz="1200" b="0" i="0">
                 <a:solidFill>
-                  <a:srgbClr val="5B2315"/>
+                  <a:srgbClr val="8E8780"/>
                 </a:solidFill>
               </a:rPr>
               <a:t>사진 5</a:t>
@@ -5578,14 +5909,14 @@
       </p:sp>
       <p:sp>
         <p:nvSpPr>
-          <p:cNvPr id="9" name="사진 자리"/>
+          <p:cNvPr id="11" name="사진 자리"/>
           <p:cNvSpPr/>
           <p:nvPr/>
         </p:nvSpPr>
         <p:spPr>
           <a:xfrm>
-            <a:off x="8036356" y="4091939"/>
-            <a:ext cx="3515258" cy="2308860"/>
+            <a:off x="8036356" y="4160520"/>
+            <a:ext cx="3515258" cy="2194560"/>
           </a:xfrm>
           <a:prstGeom prst="roundRect">
             <a:avLst>
@@ -5593,12 +5924,10 @@
             </a:avLst>
           </a:prstGeom>
           <a:solidFill>
-            <a:srgbClr val="F5D4CC"/>
+            <a:srgbClr val="F6DCD5"/>
           </a:solidFill>
           <a:ln w="19050">
-            <a:solidFill>
-              <a:srgbClr val="AE4329"/>
-            </a:solidFill>
+            <a:noFill/>
             <a:prstDash val="dash"/>
           </a:ln>
         </p:spPr>
@@ -5616,7 +5945,7 @@
             <a:r>
               <a:rPr sz="1200" b="0" i="0">
                 <a:solidFill>
-                  <a:srgbClr val="5B2315"/>
+                  <a:srgbClr val="8E8780"/>
                 </a:solidFill>
               </a:rPr>
               <a:t>사진 6</a:t>
@@ -5635,6 +5964,14 @@
 <file path=ppt/slides/slide6.xml><?xml version="1.0" encoding="utf-8"?>
 <p:sld xmlns:a="http://schemas.openxmlformats.org/drawingml/2006/main" xmlns:p="http://schemas.openxmlformats.org/presentationml/2006/main" xmlns:r="http://schemas.openxmlformats.org/officeDocument/2006/relationships">
   <p:cSld>
+    <p:bg>
+      <p:bgPr>
+        <a:solidFill>
+          <a:srgbClr val="FBEFEC"/>
+        </a:solidFill>
+        <a:effectLst/>
+      </p:bgPr>
+    </p:bg>
     <p:spTree>
       <p:nvGrpSpPr>
         <p:cNvPr id="1" name=""/>
@@ -5642,30 +5979,119 @@
         <p:nvPr/>
       </p:nvGrpSpPr>
       <p:grpSpPr/>
-      <p:pic>
-        <p:nvPicPr>
-          <p:cNvPr id="3" name="표지 그림" descr="family-30.jpg"/>
-          <p:cNvPicPr>
-            <a:picLocks noChangeAspect="1"/>
-          </p:cNvPicPr>
+      <p:sp>
+        <p:nvSpPr>
+          <p:cNvPr id="3" name="사진 자리"/>
+          <p:cNvSpPr/>
           <p:nvPr/>
-        </p:nvPicPr>
-        <p:blipFill>
-          <a:blip r:embed="rId2"/>
-          <a:stretch>
-            <a:fillRect/>
-          </a:stretch>
-        </p:blipFill>
-        <p:spPr>
-          <a:xfrm>
-            <a:off x="0" y="0"/>
-            <a:ext cx="12191695" cy="6858000"/>
+        </p:nvSpPr>
+        <p:spPr>
+          <a:xfrm>
+            <a:off x="7558851" y="685800"/>
+            <a:ext cx="3169840" cy="5486400"/>
+          </a:xfrm>
+          <a:prstGeom prst="round2SameRect">
+            <a:avLst>
+              <a:gd name="adj1" fmla="val 50000"/>
+              <a:gd name="adj2" fmla="val 0"/>
+            </a:avLst>
+          </a:prstGeom>
+          <a:solidFill>
+            <a:srgbClr val="EBBAAD"/>
+          </a:solidFill>
+          <a:ln>
+            <a:noFill/>
+          </a:ln>
+        </p:spPr>
+        <p:txBody>
+          <a:bodyPr rtlCol="0" anchor="ctr" wrap="square" lIns="54864" rIns="54864" tIns="27432" bIns="27432">
+            <a:noAutofit/>
+          </a:bodyPr>
+          <a:lstStyle/>
+          <a:p>
+            <a:pPr algn="ctr">
+              <a:lnSpc>
+                <a:spcPct val="100000"/>
+              </a:lnSpc>
+            </a:pPr>
+            <a:r>
+              <a:rPr sz="1400" b="0" i="0">
+                <a:solidFill>
+                  <a:srgbClr val="492E27"/>
+                </a:solidFill>
+              </a:rPr>
+              <a:t>사진을 넣어 주세요</a:t>
+            </a:r>
+          </a:p>
+        </p:txBody>
+      </p:sp>
+      <p:sp>
+        <p:nvSpPr>
+          <p:cNvPr id="4" name="장식"/>
+          <p:cNvSpPr/>
+          <p:nvPr/>
+        </p:nvSpPr>
+        <p:spPr>
+          <a:xfrm>
+            <a:off x="6827349" y="4251960"/>
+            <a:ext cx="1005840" cy="1005840"/>
+          </a:xfrm>
+          <a:prstGeom prst="ellipse">
+            <a:avLst/>
+          </a:prstGeom>
+          <a:solidFill>
+            <a:srgbClr val="EBBAAD"/>
+          </a:solidFill>
+          <a:ln>
+            <a:noFill/>
+          </a:ln>
+        </p:spPr>
+        <p:txBody>
+          <a:bodyPr rtlCol="0" anchor="ctr"/>
+          <a:lstStyle/>
+          <a:p>
+            <a:pPr algn="ctr"/>
+          </a:p>
+        </p:txBody>
+      </p:sp>
+      <p:sp>
+        <p:nvSpPr>
+          <p:cNvPr id="5" name="라벨"/>
+          <p:cNvSpPr txBox="1"/>
+          <p:nvPr/>
+        </p:nvSpPr>
+        <p:spPr>
+          <a:xfrm>
+            <a:off x="822960" y="2148840"/>
+            <a:ext cx="5608179" cy="274320"/>
           </a:xfrm>
           <a:prstGeom prst="rect">
             <a:avLst/>
           </a:prstGeom>
-        </p:spPr>
-      </p:pic>
+          <a:noFill/>
+        </p:spPr>
+        <p:txBody>
+          <a:bodyPr wrap="square" lIns="54864" rIns="54864" tIns="27432" bIns="27432" anchor="t">
+            <a:noAutofit/>
+          </a:bodyPr>
+          <a:lstStyle/>
+          <a:p>
+            <a:pPr algn="l">
+              <a:lnSpc>
+                <a:spcPct val="115000"/>
+              </a:lnSpc>
+            </a:pPr>
+            <a:r>
+              <a:rPr sz="1000" b="1" i="0" spc="250">
+                <a:solidFill>
+                  <a:srgbClr val="26231F"/>
+                </a:solidFill>
+              </a:rPr>
+              <a:t>FAMILY ALBUM</a:t>
+            </a:r>
+          </a:p>
+        </p:txBody>
+      </p:sp>
       <p:sp>
         <p:nvSpPr>
           <p:cNvPr id="2" name="Title 1"/>
@@ -5678,8 +6104,8 @@
         </p:nvSpPr>
         <p:spPr>
           <a:xfrm>
-            <a:off x="853418" y="2057400"/>
-            <a:ext cx="6095847" cy="1554480"/>
+            <a:off x="822960" y="2606040"/>
+            <a:ext cx="5608179" cy="1188720"/>
           </a:xfrm>
         </p:spPr>
         <p:txBody>
@@ -5694,9 +6120,9 @@
               </a:lnSpc>
             </a:pPr>
             <a:r>
-              <a:rPr sz="3600" b="1" i="0">
-                <a:solidFill>
-                  <a:srgbClr val="5B2315"/>
+              <a:rPr sz="4000" b="1" i="0">
+                <a:solidFill>
+                  <a:srgbClr val="26231F"/>
                 </a:solidFill>
               </a:rPr>
               <a:t>우리 가족 소개를 마칩니다</a:t>
@@ -5706,14 +6132,14 @@
       </p:sp>
       <p:sp>
         <p:nvSpPr>
-          <p:cNvPr id="4" name="한 줄 문구"/>
+          <p:cNvPr id="6" name="한 줄 문구"/>
           <p:cNvSpPr txBox="1"/>
           <p:nvPr/>
         </p:nvSpPr>
         <p:spPr>
           <a:xfrm>
-            <a:off x="853418" y="3749039"/>
-            <a:ext cx="6095847" cy="822960"/>
+            <a:off x="822960" y="3886200"/>
+            <a:ext cx="5608179" cy="822960"/>
           </a:xfrm>
           <a:prstGeom prst="rect">
             <a:avLst/>
@@ -5732,9 +6158,9 @@
               </a:lnSpc>
             </a:pPr>
             <a:r>
-              <a:rPr sz="1700" b="0" i="1">
-                <a:solidFill>
-                  <a:srgbClr val="5B2315"/>
+              <a:rPr sz="1700" b="0" i="0">
+                <a:solidFill>
+                  <a:srgbClr val="26231F"/>
                 </a:solidFill>
               </a:rPr>
               <a:t>읽어 주셔서 고맙습니다</a:t>
@@ -5744,14 +6170,14 @@
       </p:sp>
       <p:sp>
         <p:nvSpPr>
-          <p:cNvPr id="5" name="안내 문구"/>
+          <p:cNvPr id="7" name="안내 문구"/>
           <p:cNvSpPr txBox="1"/>
           <p:nvPr/>
         </p:nvSpPr>
         <p:spPr>
           <a:xfrm>
-            <a:off x="853418" y="4617720"/>
-            <a:ext cx="6095847" cy="914400"/>
+            <a:off x="822960" y="4754880"/>
+            <a:ext cx="5608179" cy="914400"/>
           </a:xfrm>
           <a:prstGeom prst="rect">
             <a:avLst/>
@@ -5772,7 +6198,7 @@
             <a:r>
               <a:rPr sz="1400" b="0" i="0">
                 <a:solidFill>
-                  <a:srgbClr val="666666"/>
+                  <a:srgbClr val="26231F"/>
                 </a:solidFill>
               </a:rPr>
               <a:t>고맙습니다 · 가족 이름</a:t>
@@ -5799,34 +6225,34 @@
         <a:sysClr val="window" lastClr="FFFFFF"/>
       </a:lt1>
       <a:dk2>
-        <a:srgbClr val="5B2315"/>
+        <a:srgbClr val="492E27"/>
       </a:dk2>
       <a:lt2>
-        <a:srgbClr val="FBF1EE"/>
+        <a:srgbClr val="FBEFEC"/>
       </a:lt2>
       <a:accent1>
-        <a:srgbClr val="AE4329"/>
+        <a:srgbClr val="D88C79"/>
       </a:accent1>
       <a:accent2>
-        <a:srgbClr val="3B9177"/>
+        <a:srgbClr val="E1C998"/>
       </a:accent2>
       <a:accent3>
-        <a:srgbClr val="5B2315"/>
+        <a:srgbClr val="492E27"/>
       </a:accent3>
       <a:accent4>
-        <a:srgbClr val="F5D4CC"/>
+        <a:srgbClr val="F6DCD5"/>
       </a:accent4>
       <a:accent5>
-        <a:srgbClr val="746A50"/>
+        <a:srgbClr val="DCAA88"/>
       </a:accent5>
       <a:accent6>
-        <a:srgbClr val="9D7B73"/>
+        <a:srgbClr val="92827D"/>
       </a:accent6>
       <a:hlink>
-        <a:srgbClr val="AE4329"/>
+        <a:srgbClr val="D88C79"/>
       </a:hlink>
       <a:folHlink>
-        <a:srgbClr val="5B2315"/>
+        <a:srgbClr val="492E27"/>
       </a:folHlink>
     </a:clrScheme>
     <a:fontScheme name="Office">
